--- a/ppt/X25125338_data-center-environmental-monitoring.pptx
+++ b/ppt/X25125338_data-center-environmental-monitoring.pptx
@@ -3101,8 +3101,8 @@
         </p:nvSpPr>
         <p:spPr>
           <a:xfrm>
-            <a:off x="0" y="0"/>
-            <a:ext cx="12191695" cy="2651760"/>
+            <a:off x="-91440" y="-91440"/>
+            <a:ext cx="12435840" cy="7040880"/>
           </a:xfrm>
           <a:prstGeom prst="rect">
             <a:avLst/>
@@ -3139,14 +3139,102 @@
       </p:sp>
       <p:sp>
         <p:nvSpPr>
-          <p:cNvPr id="3" name="TextBox 2"/>
+          <p:cNvPr id="3" name="Rectangle 2"/>
+          <p:cNvSpPr/>
+          <p:nvPr/>
+        </p:nvSpPr>
+        <p:spPr>
+          <a:xfrm>
+            <a:off x="0" y="0"/>
+            <a:ext cx="4297680" cy="6858000"/>
+          </a:xfrm>
+          <a:prstGeom prst="rect">
+            <a:avLst/>
+          </a:prstGeom>
+          <a:solidFill>
+            <a:srgbClr val="283B47"/>
+          </a:solidFill>
+          <a:ln>
+            <a:noFill/>
+          </a:ln>
+          <a:effectLst/>
+        </p:spPr>
+        <p:style>
+          <a:lnRef idx="1">
+            <a:schemeClr val="accent1"/>
+          </a:lnRef>
+          <a:fillRef idx="3">
+            <a:schemeClr val="accent1"/>
+          </a:fillRef>
+          <a:effectRef idx="2">
+            <a:schemeClr val="accent1"/>
+          </a:effectRef>
+          <a:fontRef idx="minor">
+            <a:schemeClr val="lt1"/>
+          </a:fontRef>
+        </p:style>
+        <p:txBody>
+          <a:bodyPr rtlCol="0" anchor="ctr"/>
+          <a:lstStyle/>
+          <a:p>
+            <a:pPr algn="ctr"/>
+          </a:p>
+        </p:txBody>
+      </p:sp>
+      <p:sp>
+        <p:nvSpPr>
+          <p:cNvPr id="4" name="Oval 3"/>
+          <p:cNvSpPr/>
+          <p:nvPr/>
+        </p:nvSpPr>
+        <p:spPr>
+          <a:xfrm>
+            <a:off x="1463040" y="1325880"/>
+            <a:ext cx="1371600" cy="1371600"/>
+          </a:xfrm>
+          <a:prstGeom prst="ellipse">
+            <a:avLst/>
+          </a:prstGeom>
+          <a:solidFill>
+            <a:srgbClr val="FFFFFF"/>
+          </a:solidFill>
+          <a:ln>
+            <a:noFill/>
+          </a:ln>
+          <a:effectLst/>
+        </p:spPr>
+        <p:style>
+          <a:lnRef idx="1">
+            <a:schemeClr val="accent1"/>
+          </a:lnRef>
+          <a:fillRef idx="3">
+            <a:schemeClr val="accent1"/>
+          </a:fillRef>
+          <a:effectRef idx="2">
+            <a:schemeClr val="accent1"/>
+          </a:effectRef>
+          <a:fontRef idx="minor">
+            <a:schemeClr val="lt1"/>
+          </a:fontRef>
+        </p:style>
+        <p:txBody>
+          <a:bodyPr rtlCol="0" anchor="ctr"/>
+          <a:lstStyle/>
+          <a:p>
+            <a:pPr algn="ctr"/>
+          </a:p>
+        </p:txBody>
+      </p:sp>
+      <p:sp>
+        <p:nvSpPr>
+          <p:cNvPr id="5" name="TextBox 4"/>
           <p:cNvSpPr txBox="1"/>
           <p:nvPr/>
         </p:nvSpPr>
         <p:spPr>
           <a:xfrm>
-            <a:off x="731520" y="731520"/>
-            <a:ext cx="10698480" cy="1463040"/>
+            <a:off x="1463040" y="1325880"/>
+            <a:ext cx="1371600" cy="1371600"/>
           </a:xfrm>
           <a:prstGeom prst="rect">
             <a:avLst/>
@@ -3154,34 +3242,34 @@
           <a:noFill/>
         </p:spPr>
         <p:txBody>
-          <a:bodyPr wrap="square" anchor="ctr">
+          <a:bodyPr wrap="none" anchor="ctr">
             <a:spAutoFit/>
           </a:bodyPr>
           <a:lstStyle/>
           <a:p>
-            <a:pPr algn="l"/>
-            <a:r>
-              <a:rPr sz="3000" b="1">
-                <a:solidFill>
-                  <a:srgbClr val="FFFFFF"/>
+            <a:pPr algn="ctr"/>
+            <a:r>
+              <a:rPr sz="4500" b="1">
+                <a:solidFill>
+                  <a:srgbClr val="283B47"/>
                 </a:solidFill>
                 <a:latin typeface="Franklin Gothic Medium"/>
               </a:rPr>
-              <a:t>Data Center Environmental Monitoring</a:t>
-            </a:r>
-          </a:p>
-        </p:txBody>
-      </p:sp>
-      <p:sp>
-        <p:nvSpPr>
-          <p:cNvPr id="4" name="TextBox 3"/>
+              <a:t>DC</a:t>
+            </a:r>
+          </a:p>
+        </p:txBody>
+      </p:sp>
+      <p:sp>
+        <p:nvSpPr>
+          <p:cNvPr id="6" name="TextBox 5"/>
           <p:cNvSpPr txBox="1"/>
           <p:nvPr/>
         </p:nvSpPr>
         <p:spPr>
           <a:xfrm>
-            <a:off x="731520" y="3108960"/>
-            <a:ext cx="10698480" cy="2743200"/>
+            <a:off x="457200" y="3108960"/>
+            <a:ext cx="3383280" cy="2743200"/>
           </a:xfrm>
           <a:prstGeom prst="rect">
             <a:avLst/>
@@ -3196,33 +3284,103 @@
           <a:p>
             <a:pPr algn="l"/>
             <a:r>
-              <a:rPr sz="1800" b="0">
-                <a:solidFill>
-                  <a:srgbClr val="5C655F"/>
+              <a:rPr sz="1500" b="0" i="1">
+                <a:solidFill>
+                  <a:srgbClr val="E1E5E8"/>
                 </a:solidFill>
                 <a:latin typeface="Calibri"/>
               </a:rPr>
               <a:t>A fog and edge pipeline across two halls and five sensor types, deployed live on AWS</a:t>
             </a:r>
           </a:p>
+        </p:txBody>
+      </p:sp>
+      <p:sp>
+        <p:nvSpPr>
+          <p:cNvPr id="7" name="TextBox 6"/>
+          <p:cNvSpPr txBox="1"/>
+          <p:nvPr/>
+        </p:nvSpPr>
+        <p:spPr>
+          <a:xfrm>
+            <a:off x="4754880" y="1737360"/>
+            <a:ext cx="7040880" cy="2194560"/>
+          </a:xfrm>
+          <a:prstGeom prst="rect">
+            <a:avLst/>
+          </a:prstGeom>
+          <a:noFill/>
+        </p:spPr>
+        <p:txBody>
+          <a:bodyPr wrap="square" anchor="ctr">
+            <a:spAutoFit/>
+          </a:bodyPr>
+          <a:lstStyle/>
           <a:p>
             <a:pPr algn="l"/>
             <a:r>
-              <a:rPr sz="1600" b="1">
-                <a:solidFill>
-                  <a:srgbClr val="232A26"/>
+              <a:rPr sz="3200" b="1" i="0">
+                <a:solidFill>
+                  <a:srgbClr val="FFFFFF"/>
+                </a:solidFill>
+                <a:latin typeface="Franklin Gothic Medium"/>
+              </a:rPr>
+              <a:t>Data Center Environmental Monitoring</a:t>
+            </a:r>
+          </a:p>
+        </p:txBody>
+      </p:sp>
+      <p:sp>
+        <p:nvSpPr>
+          <p:cNvPr id="8" name="TextBox 7"/>
+          <p:cNvSpPr txBox="1"/>
+          <p:nvPr/>
+        </p:nvSpPr>
+        <p:spPr>
+          <a:xfrm>
+            <a:off x="4754880" y="4297680"/>
+            <a:ext cx="6858000" cy="1645920"/>
+          </a:xfrm>
+          <a:prstGeom prst="rect">
+            <a:avLst/>
+          </a:prstGeom>
+          <a:noFill/>
+        </p:spPr>
+        <p:txBody>
+          <a:bodyPr wrap="square" anchor="t">
+            <a:spAutoFit/>
+          </a:bodyPr>
+          <a:lstStyle/>
+          <a:p>
+            <a:pPr algn="l"/>
+            <a:r>
+              <a:rPr sz="1700" b="1" i="0">
+                <a:solidFill>
+                  <a:srgbClr val="FFFFFF"/>
                 </a:solidFill>
                 <a:latin typeface="Calibri"/>
               </a:rPr>
-              <a:t>Nithin    Student ID X25125338</a:t>
+              <a:t>Nithin</a:t>
             </a:r>
           </a:p>
           <a:p>
             <a:pPr algn="l"/>
             <a:r>
-              <a:rPr sz="1300" b="0">
-                <a:solidFill>
-                  <a:srgbClr val="5C655F"/>
+              <a:rPr sz="1300" b="0" i="0">
+                <a:solidFill>
+                  <a:srgbClr val="C3CCD1"/>
+                </a:solidFill>
+                <a:latin typeface="Calibri"/>
+              </a:rPr>
+              <a:t>Student ID X25125338</a:t>
+            </a:r>
+          </a:p>
+          <a:p>
+            <a:pPr algn="l"/>
+            <a:r>
+              <a:rPr sz="1250" b="0" i="0">
+                <a:solidFill>
+                  <a:srgbClr val="C3CCD1"/>
                 </a:solidFill>
                 <a:latin typeface="Calibri"/>
               </a:rPr>
@@ -3232,9 +3390,9 @@
           <a:p>
             <a:pPr algn="l"/>
             <a:r>
-              <a:rPr sz="1300" b="0">
-                <a:solidFill>
-                  <a:srgbClr val="5C655F"/>
+              <a:rPr sz="1250" b="0" i="0">
+                <a:solidFill>
+                  <a:srgbClr val="C3CCD1"/>
                 </a:solidFill>
                 <a:latin typeface="Calibri"/>
               </a:rPr>

--- a/ppt/X25125338_data-center-environmental-monitoring.pptx
+++ b/ppt/X25125338_data-center-environmental-monitoring.pptx
@@ -3183,58 +3183,14 @@
       </p:sp>
       <p:sp>
         <p:nvSpPr>
-          <p:cNvPr id="4" name="Oval 3"/>
-          <p:cNvSpPr/>
+          <p:cNvPr id="4" name="TextBox 3"/>
+          <p:cNvSpPr txBox="1"/>
           <p:nvPr/>
         </p:nvSpPr>
         <p:spPr>
           <a:xfrm>
-            <a:off x="1463040" y="1325880"/>
-            <a:ext cx="1371600" cy="1371600"/>
-          </a:xfrm>
-          <a:prstGeom prst="ellipse">
-            <a:avLst/>
-          </a:prstGeom>
-          <a:solidFill>
-            <a:srgbClr val="FFFFFF"/>
-          </a:solidFill>
-          <a:ln>
-            <a:noFill/>
-          </a:ln>
-          <a:effectLst/>
-        </p:spPr>
-        <p:style>
-          <a:lnRef idx="1">
-            <a:schemeClr val="accent1"/>
-          </a:lnRef>
-          <a:fillRef idx="3">
-            <a:schemeClr val="accent1"/>
-          </a:fillRef>
-          <a:effectRef idx="2">
-            <a:schemeClr val="accent1"/>
-          </a:effectRef>
-          <a:fontRef idx="minor">
-            <a:schemeClr val="lt1"/>
-          </a:fontRef>
-        </p:style>
-        <p:txBody>
-          <a:bodyPr rtlCol="0" anchor="ctr"/>
-          <a:lstStyle/>
-          <a:p>
-            <a:pPr algn="ctr"/>
-          </a:p>
-        </p:txBody>
-      </p:sp>
-      <p:sp>
-        <p:nvSpPr>
-          <p:cNvPr id="5" name="TextBox 4"/>
-          <p:cNvSpPr txBox="1"/>
-          <p:nvPr/>
-        </p:nvSpPr>
-        <p:spPr>
-          <a:xfrm>
-            <a:off x="1463040" y="1325880"/>
-            <a:ext cx="1371600" cy="1371600"/>
+            <a:off x="457200" y="1920240"/>
+            <a:ext cx="3383280" cy="3017520"/>
           </a:xfrm>
           <a:prstGeom prst="rect">
             <a:avLst/>
@@ -3242,34 +3198,34 @@
           <a:noFill/>
         </p:spPr>
         <p:txBody>
-          <a:bodyPr wrap="none" anchor="ctr">
+          <a:bodyPr wrap="square" anchor="ctr">
             <a:spAutoFit/>
           </a:bodyPr>
           <a:lstStyle/>
           <a:p>
-            <a:pPr algn="ctr"/>
-            <a:r>
-              <a:rPr sz="4500" b="1">
-                <a:solidFill>
-                  <a:srgbClr val="283B47"/>
-                </a:solidFill>
-                <a:latin typeface="Franklin Gothic Medium"/>
+            <a:pPr algn="l"/>
+            <a:r>
+              <a:rPr sz="1600" b="0" i="1">
+                <a:solidFill>
+                  <a:srgbClr val="E1E5E8"/>
+                </a:solidFill>
+                <a:latin typeface="Calibri"/>
               </a:rPr>
-              <a:t>DC</a:t>
-            </a:r>
-          </a:p>
-        </p:txBody>
-      </p:sp>
-      <p:sp>
-        <p:nvSpPr>
-          <p:cNvPr id="6" name="TextBox 5"/>
+              <a:t>A fog and edge pipeline across two halls and five sensor types, deployed live on AWS</a:t>
+            </a:r>
+          </a:p>
+        </p:txBody>
+      </p:sp>
+      <p:sp>
+        <p:nvSpPr>
+          <p:cNvPr id="5" name="TextBox 4"/>
           <p:cNvSpPr txBox="1"/>
           <p:nvPr/>
         </p:nvSpPr>
         <p:spPr>
           <a:xfrm>
-            <a:off x="457200" y="3108960"/>
-            <a:ext cx="3383280" cy="2743200"/>
+            <a:off x="4754880" y="1783080"/>
+            <a:ext cx="7040880" cy="2377440"/>
           </a:xfrm>
           <a:prstGeom prst="rect">
             <a:avLst/>
@@ -3277,41 +3233,6 @@
           <a:noFill/>
         </p:spPr>
         <p:txBody>
-          <a:bodyPr wrap="square" anchor="t">
-            <a:spAutoFit/>
-          </a:bodyPr>
-          <a:lstStyle/>
-          <a:p>
-            <a:pPr algn="l"/>
-            <a:r>
-              <a:rPr sz="1500" b="0" i="1">
-                <a:solidFill>
-                  <a:srgbClr val="E1E5E8"/>
-                </a:solidFill>
-                <a:latin typeface="Calibri"/>
-              </a:rPr>
-              <a:t>A fog and edge pipeline across two halls and five sensor types, deployed live on AWS</a:t>
-            </a:r>
-          </a:p>
-        </p:txBody>
-      </p:sp>
-      <p:sp>
-        <p:nvSpPr>
-          <p:cNvPr id="7" name="TextBox 6"/>
-          <p:cNvSpPr txBox="1"/>
-          <p:nvPr/>
-        </p:nvSpPr>
-        <p:spPr>
-          <a:xfrm>
-            <a:off x="4754880" y="1737360"/>
-            <a:ext cx="7040880" cy="2194560"/>
-          </a:xfrm>
-          <a:prstGeom prst="rect">
-            <a:avLst/>
-          </a:prstGeom>
-          <a:noFill/>
-        </p:spPr>
-        <p:txBody>
           <a:bodyPr wrap="square" anchor="ctr">
             <a:spAutoFit/>
           </a:bodyPr>
@@ -3332,13 +3253,13 @@
       </p:sp>
       <p:sp>
         <p:nvSpPr>
-          <p:cNvPr id="8" name="TextBox 7"/>
+          <p:cNvPr id="6" name="TextBox 5"/>
           <p:cNvSpPr txBox="1"/>
           <p:nvPr/>
         </p:nvSpPr>
         <p:spPr>
           <a:xfrm>
-            <a:off x="4754880" y="4297680"/>
+            <a:off x="4754880" y="4434840"/>
             <a:ext cx="6858000" cy="1645920"/>
           </a:xfrm>
           <a:prstGeom prst="rect">
